--- a/data/2026-08-29/slides.pptx
+++ b/data/2026-08-29/slides.pptx
@@ -11,7 +11,6 @@
     <p:sldId id="259" r:id="rId11"/>
     <p:sldId id="260" r:id="rId12"/>
     <p:sldId id="261" r:id="rId13"/>
-    <p:sldId id="262" r:id="rId14"/>
   </p:sldIdLst>
   <p:sldSz cx="5559552" cy="9875520" type="screen4x3"/>
   <p:notesSz cx="6858000" cy="9144000"/>
@@ -593,7 +592,7 @@
           </a:p>
           <a:p>
             <a:r>
-              <a:t>대본: 《Microbiology spectrum》 - Prospective multicenter evaluation of an easy-to-use DNA microarray for the detection of dermatophytes in clinical samples compared with conventional mycological methods</a:t>
+              <a:t>대본: 《Aging cell》 - Shelterin TPP1 Promotes Hair Regeneration Through Activating Bulge Hair Follicle Stem Cells</a:t>
             </a:r>
           </a:p>
           <a:p>
@@ -673,7 +672,7 @@
           </a:p>
           <a:p>
             <a:r>
-              <a:t>대본: Compared with culture, the DP assay showed that the sensitivity to culture was 96.4% [94.3-98.5], while the specificity was 61.2% [54.0-68.4], reflecting additional detections rather than false positives.</a:t>
+              <a:t>대본: Wang L(1), Zhao B(1)(2), Yang J(1)(2), Liang Y(1), Yao Y(1)(2), Xiao X(1)(2), Yang L(1)(2), Xia J(1)(2), Li H(1)(2), Gao L(1)(2), Zhang J(1)(2), Su T(1)(2), Xu H(1)(2), Zhang J(1)(2), Wang H(1), Liu J(1), Hong X(1), Liu JP(1)(3)(4).</a:t>
             </a:r>
           </a:p>
           <a:p>
@@ -748,17 +747,17 @@
           <a:lstStyle/>
           <a:p>
             <a:r>
-              <a:t>[key_finding_2] 약 12초</a:t>
-            </a:r>
-          </a:p>
-          <a:p>
-            <a:r>
-              <a:t>대본: The DP assay detected dermatophytes in 367/487 samples (75.4%), outperforming DE (67.4%) and culture (63.4%).</a:t>
-            </a:r>
-          </a:p>
-          <a:p>
-            <a:r>
-              <a:t>연출 노트: 핵심 포인트 2 (없으면 이 씬 스킵)</a:t>
+              <a:t>[my_take] 약 12초</a:t>
+            </a:r>
+          </a:p>
+          <a:p>
+            <a:r>
+              <a:t>대본: 본인 코멘트를 자유롭게 추가하세요.</a:t>
+            </a:r>
+          </a:p>
+          <a:p>
+            <a:r>
+              <a:t>연출 노트: 본인 사진 + 한마디 코멘트. assets/my-photo/latest.jpg 로 직접 교체.</a:t>
             </a:r>
           </a:p>
         </p:txBody>
@@ -784,86 +783,6 @@
 </file>
 
 <file path=ppt/notesSlides/notesSlide5.xml><?xml version="1.0" encoding="utf-8"?>
-<p:notes xmlns:a="http://schemas.openxmlformats.org/drawingml/2006/main" xmlns:p="http://schemas.openxmlformats.org/presentationml/2006/main" xmlns:r="http://schemas.openxmlformats.org/officeDocument/2006/relationships">
-  <p:cSld>
-    <p:spTree>
-      <p:nvGrpSpPr>
-        <p:cNvPr id="1" name=""/>
-        <p:cNvGrpSpPr/>
-        <p:nvPr/>
-      </p:nvGrpSpPr>
-      <p:grpSpPr>
-        <a:xfrm>
-          <a:off x="0" y="0"/>
-          <a:ext cx="0" cy="0"/>
-          <a:chOff x="0" y="0"/>
-          <a:chExt cx="0" cy="0"/>
-        </a:xfrm>
-      </p:grpSpPr>
-      <p:sp>
-        <p:nvSpPr>
-          <p:cNvPr id="2" name="Slide Image Placeholder 1"/>
-          <p:cNvSpPr>
-            <a:spLocks noGrp="1"/>
-          </p:cNvSpPr>
-          <p:nvPr>
-            <p:ph type="sldImg" idx="2"/>
-          </p:nvPr>
-        </p:nvSpPr>
-        <p:spPr/>
-      </p:sp>
-      <p:sp>
-        <p:nvSpPr>
-          <p:cNvPr id="3" name="Notes Placeholder 2"/>
-          <p:cNvSpPr>
-            <a:spLocks noGrp="1"/>
-          </p:cNvSpPr>
-          <p:nvPr>
-            <p:ph type="body" idx="3" sz="quarter"/>
-          </p:nvPr>
-        </p:nvSpPr>
-        <p:spPr/>
-        <p:txBody>
-          <a:bodyPr/>
-          <a:lstStyle/>
-          <a:p>
-            <a:r>
-              <a:t>[my_take] 약 12초</a:t>
-            </a:r>
-          </a:p>
-          <a:p>
-            <a:r>
-              <a:t>대본: 본인 코멘트를 자유롭게 추가하세요.</a:t>
-            </a:r>
-          </a:p>
-          <a:p>
-            <a:r>
-              <a:t>연출 노트: 본인 사진 + 한마디 코멘트. assets/my-photo/latest.jpg 로 직접 교체.</a:t>
-            </a:r>
-          </a:p>
-        </p:txBody>
-      </p:sp>
-      <p:sp>
-        <p:nvSpPr>
-          <p:cNvPr id="4" name="Slide Number Placeholder 3"/>
-          <p:cNvSpPr>
-            <a:spLocks noGrp="1"/>
-          </p:cNvSpPr>
-          <p:nvPr>
-            <p:ph type="sldNum" idx="5" sz="quarter"/>
-          </p:nvPr>
-        </p:nvSpPr>
-        <p:spPr/>
-      </p:sp>
-    </p:spTree>
-  </p:cSld>
-  <p:clrMapOvr>
-    <a:masterClrMapping/>
-  </p:clrMapOvr>
-</p:notes>
-</file>
-
-<file path=ppt/notesSlides/notesSlide6.xml><?xml version="1.0" encoding="utf-8"?>
 <p:notes xmlns:a="http://schemas.openxmlformats.org/drawingml/2006/main" xmlns:p="http://schemas.openxmlformats.org/presentationml/2006/main" xmlns:r="http://schemas.openxmlformats.org/officeDocument/2006/relationships">
   <p:cSld>
     <p:spTree>
@@ -4052,7 +3971,7 @@
       <p:grpSpPr/>
       <p:pic>
         <p:nvPicPr>
-          <p:cNvPr id="2" name="Picture 1" descr="frame_04_key_finding_2.png"/>
+          <p:cNvPr id="2" name="Picture 1" descr="frame_05_my_take.png"/>
           <p:cNvPicPr>
             <a:picLocks noChangeAspect="1"/>
           </p:cNvPicPr>
@@ -4094,7 +4013,7 @@
       <p:grpSpPr/>
       <p:pic>
         <p:nvPicPr>
-          <p:cNvPr id="2" name="Picture 1" descr="frame_05_my_take.png"/>
+          <p:cNvPr id="2" name="Picture 1" descr="frame_06_cta.png"/>
           <p:cNvPicPr>
             <a:picLocks noChangeAspect="1"/>
           </p:cNvPicPr>
@@ -4134,48 +4053,6 @@
         <p:nvPr/>
       </p:nvGrpSpPr>
       <p:grpSpPr/>
-      <p:pic>
-        <p:nvPicPr>
-          <p:cNvPr id="2" name="Picture 1" descr="frame_06_cta.png"/>
-          <p:cNvPicPr>
-            <a:picLocks noChangeAspect="1"/>
-          </p:cNvPicPr>
-          <p:nvPr/>
-        </p:nvPicPr>
-        <p:blipFill>
-          <a:blip r:embed="rId2"/>
-          <a:stretch>
-            <a:fillRect/>
-          </a:stretch>
-        </p:blipFill>
-        <p:spPr>
-          <a:xfrm>
-            <a:off x="0" y="0"/>
-            <a:ext cx="5559552" cy="9875520"/>
-          </a:xfrm>
-          <a:prstGeom prst="rect">
-            <a:avLst/>
-          </a:prstGeom>
-        </p:spPr>
-      </p:pic>
-    </p:spTree>
-  </p:cSld>
-  <p:clrMapOvr>
-    <a:masterClrMapping/>
-  </p:clrMapOvr>
-</p:sld>
-</file>
-
-<file path=ppt/slides/slide7.xml><?xml version="1.0" encoding="utf-8"?>
-<p:sld xmlns:a="http://schemas.openxmlformats.org/drawingml/2006/main" xmlns:p="http://schemas.openxmlformats.org/presentationml/2006/main" xmlns:r="http://schemas.openxmlformats.org/officeDocument/2006/relationships">
-  <p:cSld>
-    <p:spTree>
-      <p:nvGrpSpPr>
-        <p:cNvPr id="1" name=""/>
-        <p:cNvGrpSpPr/>
-        <p:nvPr/>
-      </p:nvGrpSpPr>
-      <p:grpSpPr/>
       <p:sp>
         <p:nvSpPr>
           <p:cNvPr id="2" name="TextBox 1"/>
@@ -4204,12 +4081,12 @@
           </a:p>
           <a:p>
             <a:r>
-              <a:t>Prospective multicenter evaluation of an easy-to-use DNA microarray for the detection of dermatophytes in clinical samples compared with conventional mycological methods</a:t>
-            </a:r>
-          </a:p>
-          <a:p>
-            <a:r>
-              <a:t>https://pubmed.ncbi.nlm.nih.gov/42663453/</a:t>
+              <a:t>Shelterin TPP1 Promotes Hair Regeneration Through Activating Bulge Hair Follicle Stem Cells</a:t>
+            </a:r>
+          </a:p>
+          <a:p>
+            <a:r>
+              <a:t>https://pubmed.ncbi.nlm.nih.gov/42663085/</a:t>
             </a:r>
           </a:p>
         </p:txBody>

--- a/data/2026-08-29/slides.pptx
+++ b/data/2026-08-29/slides.pptx
@@ -11,6 +11,7 @@
     <p:sldId id="259" r:id="rId11"/>
     <p:sldId id="260" r:id="rId12"/>
     <p:sldId id="261" r:id="rId13"/>
+    <p:sldId id="262" r:id="rId14"/>
   </p:sldIdLst>
   <p:sldSz cx="5559552" cy="9875520" type="screen4x3"/>
   <p:notesSz cx="6858000" cy="9144000"/>
@@ -592,7 +593,7 @@
           </a:p>
           <a:p>
             <a:r>
-              <a:t>대본: 《Aging cell》 - Shelterin TPP1 Promotes Hair Regeneration Through Activating Bulge Hair Follicle Stem Cells</a:t>
+              <a:t>대본: 《The Journal of dermatology》 - RETRACTION: Comparative Efficacy of Janus Kinase Inhibitors Indicated for Severe Alopecia Areata: A Bayesian Network Meta-Analysis and Matching-Adjusted Indirect Comparison</a:t>
             </a:r>
           </a:p>
           <a:p>
@@ -672,7 +673,7 @@
           </a:p>
           <a:p>
             <a:r>
-              <a:t>대본: Wang L(1), Zhao B(1)(2), Yang J(1)(2), Liang Y(1), Yao Y(1)(2), Xiao X(1)(2), Yang L(1)(2), Xia J(1)(2), Li H(1)(2), Gao L(1)(2), Zhang J(1)(2), Su T(1)(2), Xu H(1)(2), Zhang J(1)(2), Wang H(1), Liu J(1), Hong X(1), Liu JP(1)(3)(4).</a:t>
+              <a:t>대본: 6 (2025): 1134-1142, https://doi.org/10.1111/jdv.20372.</a:t>
             </a:r>
           </a:p>
           <a:p>
@@ -747,17 +748,17 @@
           <a:lstStyle/>
           <a:p>
             <a:r>
-              <a:t>[my_take] 약 12초</a:t>
-            </a:r>
-          </a:p>
-          <a:p>
-            <a:r>
-              <a:t>대본: 본인 코멘트를 자유롭게 추가하세요.</a:t>
-            </a:r>
-          </a:p>
-          <a:p>
-            <a:r>
-              <a:t>연출 노트: 본인 사진 + 한마디 코멘트. assets/my-photo/latest.jpg 로 직접 교체.</a:t>
+              <a:t>[key_finding_2] 약 12초</a:t>
+            </a:r>
+          </a:p>
+          <a:p>
+            <a:r>
+              <a:t>대본: Babul, "Comparative Efficacy of Janus Kinase Inhibitors Indicated for Severe Alopecia Areata: A Bayesian Network Meta-Analysis and Matching-Adjusted Indirect Comparison," The Journal of Dermatology (Early View): https://doi.org/10.1111/1346-8138.17959.</a:t>
+            </a:r>
+          </a:p>
+          <a:p>
+            <a:r>
+              <a:t>연출 노트: 핵심 포인트 2 (없으면 이 씬 스킵)</a:t>
             </a:r>
           </a:p>
         </p:txBody>
@@ -783,6 +784,86 @@
 </file>
 
 <file path=ppt/notesSlides/notesSlide5.xml><?xml version="1.0" encoding="utf-8"?>
+<p:notes xmlns:a="http://schemas.openxmlformats.org/drawingml/2006/main" xmlns:p="http://schemas.openxmlformats.org/presentationml/2006/main" xmlns:r="http://schemas.openxmlformats.org/officeDocument/2006/relationships">
+  <p:cSld>
+    <p:spTree>
+      <p:nvGrpSpPr>
+        <p:cNvPr id="1" name=""/>
+        <p:cNvGrpSpPr/>
+        <p:nvPr/>
+      </p:nvGrpSpPr>
+      <p:grpSpPr>
+        <a:xfrm>
+          <a:off x="0" y="0"/>
+          <a:ext cx="0" cy="0"/>
+          <a:chOff x="0" y="0"/>
+          <a:chExt cx="0" cy="0"/>
+        </a:xfrm>
+      </p:grpSpPr>
+      <p:sp>
+        <p:nvSpPr>
+          <p:cNvPr id="2" name="Slide Image Placeholder 1"/>
+          <p:cNvSpPr>
+            <a:spLocks noGrp="1"/>
+          </p:cNvSpPr>
+          <p:nvPr>
+            <p:ph type="sldImg" idx="2"/>
+          </p:nvPr>
+        </p:nvSpPr>
+        <p:spPr/>
+      </p:sp>
+      <p:sp>
+        <p:nvSpPr>
+          <p:cNvPr id="3" name="Notes Placeholder 2"/>
+          <p:cNvSpPr>
+            <a:spLocks noGrp="1"/>
+          </p:cNvSpPr>
+          <p:nvPr>
+            <p:ph type="body" idx="3" sz="quarter"/>
+          </p:nvPr>
+        </p:nvSpPr>
+        <p:spPr/>
+        <p:txBody>
+          <a:bodyPr/>
+          <a:lstStyle/>
+          <a:p>
+            <a:r>
+              <a:t>[my_take] 약 12초</a:t>
+            </a:r>
+          </a:p>
+          <a:p>
+            <a:r>
+              <a:t>대본: 본인 코멘트를 자유롭게 추가하세요.</a:t>
+            </a:r>
+          </a:p>
+          <a:p>
+            <a:r>
+              <a:t>연출 노트: 본인 사진 + 한마디 코멘트. assets/my-photo/latest.jpg 로 직접 교체.</a:t>
+            </a:r>
+          </a:p>
+        </p:txBody>
+      </p:sp>
+      <p:sp>
+        <p:nvSpPr>
+          <p:cNvPr id="4" name="Slide Number Placeholder 3"/>
+          <p:cNvSpPr>
+            <a:spLocks noGrp="1"/>
+          </p:cNvSpPr>
+          <p:nvPr>
+            <p:ph type="sldNum" idx="5" sz="quarter"/>
+          </p:nvPr>
+        </p:nvSpPr>
+        <p:spPr/>
+      </p:sp>
+    </p:spTree>
+  </p:cSld>
+  <p:clrMapOvr>
+    <a:masterClrMapping/>
+  </p:clrMapOvr>
+</p:notes>
+</file>
+
+<file path=ppt/notesSlides/notesSlide6.xml><?xml version="1.0" encoding="utf-8"?>
 <p:notes xmlns:a="http://schemas.openxmlformats.org/drawingml/2006/main" xmlns:p="http://schemas.openxmlformats.org/presentationml/2006/main" xmlns:r="http://schemas.openxmlformats.org/officeDocument/2006/relationships">
   <p:cSld>
     <p:spTree>
@@ -3971,7 +4052,7 @@
       <p:grpSpPr/>
       <p:pic>
         <p:nvPicPr>
-          <p:cNvPr id="2" name="Picture 1" descr="frame_05_my_take.png"/>
+          <p:cNvPr id="2" name="Picture 1" descr="frame_04_key_finding_2.png"/>
           <p:cNvPicPr>
             <a:picLocks noChangeAspect="1"/>
           </p:cNvPicPr>
@@ -4013,7 +4094,7 @@
       <p:grpSpPr/>
       <p:pic>
         <p:nvPicPr>
-          <p:cNvPr id="2" name="Picture 1" descr="frame_06_cta.png"/>
+          <p:cNvPr id="2" name="Picture 1" descr="frame_05_my_take.png"/>
           <p:cNvPicPr>
             <a:picLocks noChangeAspect="1"/>
           </p:cNvPicPr>
@@ -4053,6 +4134,48 @@
         <p:nvPr/>
       </p:nvGrpSpPr>
       <p:grpSpPr/>
+      <p:pic>
+        <p:nvPicPr>
+          <p:cNvPr id="2" name="Picture 1" descr="frame_06_cta.png"/>
+          <p:cNvPicPr>
+            <a:picLocks noChangeAspect="1"/>
+          </p:cNvPicPr>
+          <p:nvPr/>
+        </p:nvPicPr>
+        <p:blipFill>
+          <a:blip r:embed="rId2"/>
+          <a:stretch>
+            <a:fillRect/>
+          </a:stretch>
+        </p:blipFill>
+        <p:spPr>
+          <a:xfrm>
+            <a:off x="0" y="0"/>
+            <a:ext cx="5559552" cy="9875520"/>
+          </a:xfrm>
+          <a:prstGeom prst="rect">
+            <a:avLst/>
+          </a:prstGeom>
+        </p:spPr>
+      </p:pic>
+    </p:spTree>
+  </p:cSld>
+  <p:clrMapOvr>
+    <a:masterClrMapping/>
+  </p:clrMapOvr>
+</p:sld>
+</file>
+
+<file path=ppt/slides/slide7.xml><?xml version="1.0" encoding="utf-8"?>
+<p:sld xmlns:a="http://schemas.openxmlformats.org/drawingml/2006/main" xmlns:p="http://schemas.openxmlformats.org/presentationml/2006/main" xmlns:r="http://schemas.openxmlformats.org/officeDocument/2006/relationships">
+  <p:cSld>
+    <p:spTree>
+      <p:nvGrpSpPr>
+        <p:cNvPr id="1" name=""/>
+        <p:cNvGrpSpPr/>
+        <p:nvPr/>
+      </p:nvGrpSpPr>
+      <p:grpSpPr/>
       <p:sp>
         <p:nvSpPr>
           <p:cNvPr id="2" name="TextBox 1"/>
@@ -4081,12 +4204,12 @@
           </a:p>
           <a:p>
             <a:r>
-              <a:t>Shelterin TPP1 Promotes Hair Regeneration Through Activating Bulge Hair Follicle Stem Cells</a:t>
-            </a:r>
-          </a:p>
-          <a:p>
-            <a:r>
-              <a:t>https://pubmed.ncbi.nlm.nih.gov/42663085/</a:t>
+              <a:t>RETRACTION: Comparative Efficacy of Janus Kinase Inhibitors Indicated for Severe Alopecia Areata: A Bayesian Network Meta-Analysis and Matching-Adjusted Indirect Comparison</a:t>
+            </a:r>
+          </a:p>
+          <a:p>
+            <a:r>
+              <a:t>https://pubmed.ncbi.nlm.nih.gov/42661279/</a:t>
             </a:r>
           </a:p>
         </p:txBody>

--- a/data/2026-08-29/slides.pptx
+++ b/data/2026-08-29/slides.pptx
@@ -11,7 +11,6 @@
     <p:sldId id="259" r:id="rId11"/>
     <p:sldId id="260" r:id="rId12"/>
     <p:sldId id="261" r:id="rId13"/>
-    <p:sldId id="262" r:id="rId14"/>
   </p:sldIdLst>
   <p:sldSz cx="5559552" cy="9875520" type="screen4x3"/>
   <p:notesSz cx="6858000" cy="9144000"/>
@@ -593,7 +592,7 @@
           </a:p>
           <a:p>
             <a:r>
-              <a:t>대본: 《The Journal of dermatology》 - RETRACTION: Comparative Efficacy of Janus Kinase Inhibitors Indicated for Severe Alopecia Areata: A Bayesian Network Meta-Analysis and Matching-Adjusted Indirect Comparison</a:t>
+              <a:t>대본: 《Prostaglandins &amp; other lipid mediators》 - Role of Prostaglandins in Androgenetic Alopecia</a:t>
             </a:r>
           </a:p>
           <a:p>
@@ -673,7 +672,7 @@
           </a:p>
           <a:p>
             <a:r>
-              <a:t>대본: 6 (2025): 1134-1142, https://doi.org/10.1111/jdv.20372.</a:t>
+              <a:t>대본: Several novel agents, including PG analogs, receptor modulators, and 15-hydroxyprostaglandin dehydrogenase inhibitors, have shown potential applications in AGA treatment.</a:t>
             </a:r>
           </a:p>
           <a:p>
@@ -748,17 +747,17 @@
           <a:lstStyle/>
           <a:p>
             <a:r>
-              <a:t>[key_finding_2] 약 12초</a:t>
-            </a:r>
-          </a:p>
-          <a:p>
-            <a:r>
-              <a:t>대본: Babul, "Comparative Efficacy of Janus Kinase Inhibitors Indicated for Severe Alopecia Areata: A Bayesian Network Meta-Analysis and Matching-Adjusted Indirect Comparison," The Journal of Dermatology (Early View): https://doi.org/10.1111/1346-8138.17959.</a:t>
-            </a:r>
-          </a:p>
-          <a:p>
-            <a:r>
-              <a:t>연출 노트: 핵심 포인트 2 (없으면 이 씬 스킵)</a:t>
+              <a:t>[my_take] 약 12초</a:t>
+            </a:r>
+          </a:p>
+          <a:p>
+            <a:r>
+              <a:t>대본: 본인 코멘트를 자유롭게 추가하세요.</a:t>
+            </a:r>
+          </a:p>
+          <a:p>
+            <a:r>
+              <a:t>연출 노트: 본인 사진 + 한마디 코멘트. assets/my-photo/latest.jpg 로 직접 교체.</a:t>
             </a:r>
           </a:p>
         </p:txBody>
@@ -784,86 +783,6 @@
 </file>
 
 <file path=ppt/notesSlides/notesSlide5.xml><?xml version="1.0" encoding="utf-8"?>
-<p:notes xmlns:a="http://schemas.openxmlformats.org/drawingml/2006/main" xmlns:p="http://schemas.openxmlformats.org/presentationml/2006/main" xmlns:r="http://schemas.openxmlformats.org/officeDocument/2006/relationships">
-  <p:cSld>
-    <p:spTree>
-      <p:nvGrpSpPr>
-        <p:cNvPr id="1" name=""/>
-        <p:cNvGrpSpPr/>
-        <p:nvPr/>
-      </p:nvGrpSpPr>
-      <p:grpSpPr>
-        <a:xfrm>
-          <a:off x="0" y="0"/>
-          <a:ext cx="0" cy="0"/>
-          <a:chOff x="0" y="0"/>
-          <a:chExt cx="0" cy="0"/>
-        </a:xfrm>
-      </p:grpSpPr>
-      <p:sp>
-        <p:nvSpPr>
-          <p:cNvPr id="2" name="Slide Image Placeholder 1"/>
-          <p:cNvSpPr>
-            <a:spLocks noGrp="1"/>
-          </p:cNvSpPr>
-          <p:nvPr>
-            <p:ph type="sldImg" idx="2"/>
-          </p:nvPr>
-        </p:nvSpPr>
-        <p:spPr/>
-      </p:sp>
-      <p:sp>
-        <p:nvSpPr>
-          <p:cNvPr id="3" name="Notes Placeholder 2"/>
-          <p:cNvSpPr>
-            <a:spLocks noGrp="1"/>
-          </p:cNvSpPr>
-          <p:nvPr>
-            <p:ph type="body" idx="3" sz="quarter"/>
-          </p:nvPr>
-        </p:nvSpPr>
-        <p:spPr/>
-        <p:txBody>
-          <a:bodyPr/>
-          <a:lstStyle/>
-          <a:p>
-            <a:r>
-              <a:t>[my_take] 약 12초</a:t>
-            </a:r>
-          </a:p>
-          <a:p>
-            <a:r>
-              <a:t>대본: 본인 코멘트를 자유롭게 추가하세요.</a:t>
-            </a:r>
-          </a:p>
-          <a:p>
-            <a:r>
-              <a:t>연출 노트: 본인 사진 + 한마디 코멘트. assets/my-photo/latest.jpg 로 직접 교체.</a:t>
-            </a:r>
-          </a:p>
-        </p:txBody>
-      </p:sp>
-      <p:sp>
-        <p:nvSpPr>
-          <p:cNvPr id="4" name="Slide Number Placeholder 3"/>
-          <p:cNvSpPr>
-            <a:spLocks noGrp="1"/>
-          </p:cNvSpPr>
-          <p:nvPr>
-            <p:ph type="sldNum" idx="5" sz="quarter"/>
-          </p:nvPr>
-        </p:nvSpPr>
-        <p:spPr/>
-      </p:sp>
-    </p:spTree>
-  </p:cSld>
-  <p:clrMapOvr>
-    <a:masterClrMapping/>
-  </p:clrMapOvr>
-</p:notes>
-</file>
-
-<file path=ppt/notesSlides/notesSlide6.xml><?xml version="1.0" encoding="utf-8"?>
 <p:notes xmlns:a="http://schemas.openxmlformats.org/drawingml/2006/main" xmlns:p="http://schemas.openxmlformats.org/presentationml/2006/main" xmlns:r="http://schemas.openxmlformats.org/officeDocument/2006/relationships">
   <p:cSld>
     <p:spTree>
@@ -4052,7 +3971,7 @@
       <p:grpSpPr/>
       <p:pic>
         <p:nvPicPr>
-          <p:cNvPr id="2" name="Picture 1" descr="frame_04_key_finding_2.png"/>
+          <p:cNvPr id="2" name="Picture 1" descr="frame_05_my_take.png"/>
           <p:cNvPicPr>
             <a:picLocks noChangeAspect="1"/>
           </p:cNvPicPr>
@@ -4094,7 +4013,7 @@
       <p:grpSpPr/>
       <p:pic>
         <p:nvPicPr>
-          <p:cNvPr id="2" name="Picture 1" descr="frame_05_my_take.png"/>
+          <p:cNvPr id="2" name="Picture 1" descr="frame_06_cta.png"/>
           <p:cNvPicPr>
             <a:picLocks noChangeAspect="1"/>
           </p:cNvPicPr>
@@ -4134,48 +4053,6 @@
         <p:nvPr/>
       </p:nvGrpSpPr>
       <p:grpSpPr/>
-      <p:pic>
-        <p:nvPicPr>
-          <p:cNvPr id="2" name="Picture 1" descr="frame_06_cta.png"/>
-          <p:cNvPicPr>
-            <a:picLocks noChangeAspect="1"/>
-          </p:cNvPicPr>
-          <p:nvPr/>
-        </p:nvPicPr>
-        <p:blipFill>
-          <a:blip r:embed="rId2"/>
-          <a:stretch>
-            <a:fillRect/>
-          </a:stretch>
-        </p:blipFill>
-        <p:spPr>
-          <a:xfrm>
-            <a:off x="0" y="0"/>
-            <a:ext cx="5559552" cy="9875520"/>
-          </a:xfrm>
-          <a:prstGeom prst="rect">
-            <a:avLst/>
-          </a:prstGeom>
-        </p:spPr>
-      </p:pic>
-    </p:spTree>
-  </p:cSld>
-  <p:clrMapOvr>
-    <a:masterClrMapping/>
-  </p:clrMapOvr>
-</p:sld>
-</file>
-
-<file path=ppt/slides/slide7.xml><?xml version="1.0" encoding="utf-8"?>
-<p:sld xmlns:a="http://schemas.openxmlformats.org/drawingml/2006/main" xmlns:p="http://schemas.openxmlformats.org/presentationml/2006/main" xmlns:r="http://schemas.openxmlformats.org/officeDocument/2006/relationships">
-  <p:cSld>
-    <p:spTree>
-      <p:nvGrpSpPr>
-        <p:cNvPr id="1" name=""/>
-        <p:cNvGrpSpPr/>
-        <p:nvPr/>
-      </p:nvGrpSpPr>
-      <p:grpSpPr/>
       <p:sp>
         <p:nvSpPr>
           <p:cNvPr id="2" name="TextBox 1"/>
@@ -4204,12 +4081,12 @@
           </a:p>
           <a:p>
             <a:r>
-              <a:t>RETRACTION: Comparative Efficacy of Janus Kinase Inhibitors Indicated for Severe Alopecia Areata: A Bayesian Network Meta-Analysis and Matching-Adjusted Indirect Comparison</a:t>
-            </a:r>
-          </a:p>
-          <a:p>
-            <a:r>
-              <a:t>https://pubmed.ncbi.nlm.nih.gov/42661279/</a:t>
+              <a:t>Role of Prostaglandins in Androgenetic Alopecia</a:t>
+            </a:r>
+          </a:p>
+          <a:p>
+            <a:r>
+              <a:t>https://pubmed.ncbi.nlm.nih.gov/42660347/</a:t>
             </a:r>
           </a:p>
         </p:txBody>

--- a/data/2026-08-29/slides.pptx
+++ b/data/2026-08-29/slides.pptx
@@ -11,6 +11,7 @@
     <p:sldId id="259" r:id="rId11"/>
     <p:sldId id="260" r:id="rId12"/>
     <p:sldId id="261" r:id="rId13"/>
+    <p:sldId id="262" r:id="rId14"/>
   </p:sldIdLst>
   <p:sldSz cx="5559552" cy="9875520" type="screen4x3"/>
   <p:notesSz cx="6858000" cy="9144000"/>
@@ -592,7 +593,7 @@
           </a:p>
           <a:p>
             <a:r>
-              <a:t>대본: 《Prostaglandins &amp; other lipid mediators》 - Role of Prostaglandins in Androgenetic Alopecia</a:t>
+              <a:t>대본: 《International journal of cosmetic science》 - New insights from data analysis of 12 global clinical studies on hair shedding</a:t>
             </a:r>
           </a:p>
           <a:p>
@@ -672,7 +673,7 @@
           </a:p>
           <a:p>
             <a:r>
-              <a:t>대본: Several novel agents, including PG analogs, receptor modulators, and 15-hydroxyprostaglandin dehydrogenase inhibitors, have shown potential applications in AGA treatment.</a:t>
+              <a:t>대본: Cette recherche a analysé 12 études cliniques portant sur 805 participants (323 hommes et 482 femmes) issus de 8 pays (Chine, Indonésie, Royaume‐Uni, Inde, Brésil, Thaïlande, Turquie et États‐Unis) préoccupés par la perte de cheveux.</a:t>
             </a:r>
           </a:p>
           <a:p>
@@ -747,17 +748,17 @@
           <a:lstStyle/>
           <a:p>
             <a:r>
-              <a:t>[my_take] 약 12초</a:t>
-            </a:r>
-          </a:p>
-          <a:p>
-            <a:r>
-              <a:t>대본: 본인 코멘트를 자유롭게 추가하세요.</a:t>
-            </a:r>
-          </a:p>
-          <a:p>
-            <a:r>
-              <a:t>연출 노트: 본인 사진 + 한마디 코멘트. assets/my-photo/latest.jpg 로 직접 교체.</a:t>
+              <a:t>[key_finding_2] 약 12초</a:t>
+            </a:r>
+          </a:p>
+          <a:p>
+            <a:r>
+              <a:t>대본: Dans les 3 études asiatiques récentes, alors que la chute totale de cheveux comprenait à la fois les cheveux tombés à la racine (cheveux exogènes présentant une extrémité en forme caractéristique d’une massue) et les cheveux cassés, les cheveux tombés à la racine représentaient la proportion prédominante, soit en moyenne 96,5 % de la chute totale chez les participantes chinoises, 98,8 % chez les participants chinois et 72,2 % chez les participantes indonésiennes.</a:t>
+            </a:r>
+          </a:p>
+          <a:p>
+            <a:r>
+              <a:t>연출 노트: 핵심 포인트 2 (없으면 이 씬 스킵)</a:t>
             </a:r>
           </a:p>
         </p:txBody>
@@ -783,6 +784,86 @@
 </file>
 
 <file path=ppt/notesSlides/notesSlide5.xml><?xml version="1.0" encoding="utf-8"?>
+<p:notes xmlns:a="http://schemas.openxmlformats.org/drawingml/2006/main" xmlns:p="http://schemas.openxmlformats.org/presentationml/2006/main" xmlns:r="http://schemas.openxmlformats.org/officeDocument/2006/relationships">
+  <p:cSld>
+    <p:spTree>
+      <p:nvGrpSpPr>
+        <p:cNvPr id="1" name=""/>
+        <p:cNvGrpSpPr/>
+        <p:nvPr/>
+      </p:nvGrpSpPr>
+      <p:grpSpPr>
+        <a:xfrm>
+          <a:off x="0" y="0"/>
+          <a:ext cx="0" cy="0"/>
+          <a:chOff x="0" y="0"/>
+          <a:chExt cx="0" cy="0"/>
+        </a:xfrm>
+      </p:grpSpPr>
+      <p:sp>
+        <p:nvSpPr>
+          <p:cNvPr id="2" name="Slide Image Placeholder 1"/>
+          <p:cNvSpPr>
+            <a:spLocks noGrp="1"/>
+          </p:cNvSpPr>
+          <p:nvPr>
+            <p:ph type="sldImg" idx="2"/>
+          </p:nvPr>
+        </p:nvSpPr>
+        <p:spPr/>
+      </p:sp>
+      <p:sp>
+        <p:nvSpPr>
+          <p:cNvPr id="3" name="Notes Placeholder 2"/>
+          <p:cNvSpPr>
+            <a:spLocks noGrp="1"/>
+          </p:cNvSpPr>
+          <p:nvPr>
+            <p:ph type="body" idx="3" sz="quarter"/>
+          </p:nvPr>
+        </p:nvSpPr>
+        <p:spPr/>
+        <p:txBody>
+          <a:bodyPr/>
+          <a:lstStyle/>
+          <a:p>
+            <a:r>
+              <a:t>[my_take] 약 12초</a:t>
+            </a:r>
+          </a:p>
+          <a:p>
+            <a:r>
+              <a:t>대본: 본인 코멘트를 자유롭게 추가하세요.</a:t>
+            </a:r>
+          </a:p>
+          <a:p>
+            <a:r>
+              <a:t>연출 노트: 본인 사진 + 한마디 코멘트. assets/my-photo/latest.jpg 로 직접 교체.</a:t>
+            </a:r>
+          </a:p>
+        </p:txBody>
+      </p:sp>
+      <p:sp>
+        <p:nvSpPr>
+          <p:cNvPr id="4" name="Slide Number Placeholder 3"/>
+          <p:cNvSpPr>
+            <a:spLocks noGrp="1"/>
+          </p:cNvSpPr>
+          <p:nvPr>
+            <p:ph type="sldNum" idx="5" sz="quarter"/>
+          </p:nvPr>
+        </p:nvSpPr>
+        <p:spPr/>
+      </p:sp>
+    </p:spTree>
+  </p:cSld>
+  <p:clrMapOvr>
+    <a:masterClrMapping/>
+  </p:clrMapOvr>
+</p:notes>
+</file>
+
+<file path=ppt/notesSlides/notesSlide6.xml><?xml version="1.0" encoding="utf-8"?>
 <p:notes xmlns:a="http://schemas.openxmlformats.org/drawingml/2006/main" xmlns:p="http://schemas.openxmlformats.org/presentationml/2006/main" xmlns:r="http://schemas.openxmlformats.org/officeDocument/2006/relationships">
   <p:cSld>
     <p:spTree>
@@ -3971,7 +4052,7 @@
       <p:grpSpPr/>
       <p:pic>
         <p:nvPicPr>
-          <p:cNvPr id="2" name="Picture 1" descr="frame_05_my_take.png"/>
+          <p:cNvPr id="2" name="Picture 1" descr="frame_04_key_finding_2.png"/>
           <p:cNvPicPr>
             <a:picLocks noChangeAspect="1"/>
           </p:cNvPicPr>
@@ -4013,7 +4094,7 @@
       <p:grpSpPr/>
       <p:pic>
         <p:nvPicPr>
-          <p:cNvPr id="2" name="Picture 1" descr="frame_06_cta.png"/>
+          <p:cNvPr id="2" name="Picture 1" descr="frame_05_my_take.png"/>
           <p:cNvPicPr>
             <a:picLocks noChangeAspect="1"/>
           </p:cNvPicPr>
@@ -4053,6 +4134,48 @@
         <p:nvPr/>
       </p:nvGrpSpPr>
       <p:grpSpPr/>
+      <p:pic>
+        <p:nvPicPr>
+          <p:cNvPr id="2" name="Picture 1" descr="frame_06_cta.png"/>
+          <p:cNvPicPr>
+            <a:picLocks noChangeAspect="1"/>
+          </p:cNvPicPr>
+          <p:nvPr/>
+        </p:nvPicPr>
+        <p:blipFill>
+          <a:blip r:embed="rId2"/>
+          <a:stretch>
+            <a:fillRect/>
+          </a:stretch>
+        </p:blipFill>
+        <p:spPr>
+          <a:xfrm>
+            <a:off x="0" y="0"/>
+            <a:ext cx="5559552" cy="9875520"/>
+          </a:xfrm>
+          <a:prstGeom prst="rect">
+            <a:avLst/>
+          </a:prstGeom>
+        </p:spPr>
+      </p:pic>
+    </p:spTree>
+  </p:cSld>
+  <p:clrMapOvr>
+    <a:masterClrMapping/>
+  </p:clrMapOvr>
+</p:sld>
+</file>
+
+<file path=ppt/slides/slide7.xml><?xml version="1.0" encoding="utf-8"?>
+<p:sld xmlns:a="http://schemas.openxmlformats.org/drawingml/2006/main" xmlns:p="http://schemas.openxmlformats.org/presentationml/2006/main" xmlns:r="http://schemas.openxmlformats.org/officeDocument/2006/relationships">
+  <p:cSld>
+    <p:spTree>
+      <p:nvGrpSpPr>
+        <p:cNvPr id="1" name=""/>
+        <p:cNvGrpSpPr/>
+        <p:nvPr/>
+      </p:nvGrpSpPr>
+      <p:grpSpPr/>
       <p:sp>
         <p:nvSpPr>
           <p:cNvPr id="2" name="TextBox 1"/>
@@ -4081,12 +4204,12 @@
           </a:p>
           <a:p>
             <a:r>
-              <a:t>Role of Prostaglandins in Androgenetic Alopecia</a:t>
-            </a:r>
-          </a:p>
-          <a:p>
-            <a:r>
-              <a:t>https://pubmed.ncbi.nlm.nih.gov/42660347/</a:t>
+              <a:t>New insights from data analysis of 12 global clinical studies on hair shedding</a:t>
+            </a:r>
+          </a:p>
+          <a:p>
+            <a:r>
+              <a:t>https://pubmed.ncbi.nlm.nih.gov/42657759/</a:t>
             </a:r>
           </a:p>
         </p:txBody>

--- a/data/2026-08-29/slides.pptx
+++ b/data/2026-08-29/slides.pptx
@@ -593,7 +593,7 @@
           </a:p>
           <a:p>
             <a:r>
-              <a:t>대본: 《International journal of cosmetic science》 - New insights from data analysis of 12 global clinical studies on hair shedding</a:t>
+              <a:t>대본: 《Asian Pacific journal of cancer prevention : APJCP》 - Do Generic EGFR-TKIs Perform as Well as Innovators? Real-World Evidence from Gefitinib-Treated EGFR-Mutated NSCLC in Indonesia</a:t>
             </a:r>
           </a:p>
           <a:p>
@@ -673,7 +673,7 @@
           </a:p>
           <a:p>
             <a:r>
-              <a:t>대본: Cette recherche a analysé 12 études cliniques portant sur 805 participants (323 hommes et 482 femmes) issus de 8 pays (Chine, Indonésie, Royaume‐Uni, Inde, Brésil, Thaïlande, Turquie et États‐Unis) préoccupés par la perte de cheveux.</a:t>
+              <a:t>대본: Result: A total of 192 patients met the inclusion criteria (innovator n = 124; generic n = 68).</a:t>
             </a:r>
           </a:p>
           <a:p>
@@ -753,7 +753,7 @@
           </a:p>
           <a:p>
             <a:r>
-              <a:t>대본: Dans les 3 études asiatiques récentes, alors que la chute totale de cheveux comprenait à la fois les cheveux tombés à la racine (cheveux exogènes présentant une extrémité en forme caractéristique d’une massue) et les cheveux cassés, les cheveux tombés à la racine représentaient la proportion prédominante, soit en moyenne 96,5 % de la chute totale chez les participantes chinoises, 98,8 % chez les participants chinois et 72,2 % chez les participantes indonésiennes.</a:t>
+              <a:t>대본: The median PFS was 12.2 months (95% CI, 8.7-15.7) in the innovator group and 16.4 months (95% CI, 13.7-19.1) in the generic group.</a:t>
             </a:r>
           </a:p>
           <a:p>
@@ -4204,12 +4204,12 @@
           </a:p>
           <a:p>
             <a:r>
-              <a:t>New insights from data analysis of 12 global clinical studies on hair shedding</a:t>
-            </a:r>
-          </a:p>
-          <a:p>
-            <a:r>
-              <a:t>https://pubmed.ncbi.nlm.nih.gov/42657759/</a:t>
+              <a:t>Do Generic EGFR-TKIs Perform as Well as Innovators? Real-World Evidence from Gefitinib-Treated EGFR-Mutated NSCLC in Indonesia</a:t>
+            </a:r>
+          </a:p>
+          <a:p>
+            <a:r>
+              <a:t>https://pubmed.ncbi.nlm.nih.gov/42663218/</a:t>
             </a:r>
           </a:p>
         </p:txBody>

--- a/data/2026-08-29/slides.pptx
+++ b/data/2026-08-29/slides.pptx
@@ -593,7 +593,7 @@
           </a:p>
           <a:p>
             <a:r>
-              <a:t>대본: 《Asian Pacific journal of cancer prevention : APJCP》 - Do Generic EGFR-TKIs Perform as Well as Innovators? Real-World Evidence from Gefitinib-Treated EGFR-Mutated NSCLC in Indonesia</a:t>
+              <a:t>대본: 《Aging cell》 - Shelterin TPP1 Promotes Hair Regeneration Through Activating Bulge Hair Follicle Stem Cells</a:t>
             </a:r>
           </a:p>
           <a:p>
@@ -673,7 +673,7 @@
           </a:p>
           <a:p>
             <a:r>
-              <a:t>대본: Result: A total of 192 patients met the inclusion criteria (innovator n = 124; generic n = 68).</a:t>
+              <a:t>대본: Telomere shortening drives hair follicle senescence, yet successful reversal of this aging process has remained elusive.</a:t>
             </a:r>
           </a:p>
           <a:p>
@@ -753,7 +753,7 @@
           </a:p>
           <a:p>
             <a:r>
-              <a:t>대본: The median PFS was 12.2 months (95% CI, 8.7-15.7) in the innovator group and 16.4 months (95% CI, 13.7-19.1) in the generic group.</a:t>
+              <a:t>대본: Here, we report that stem cell overexpression of Acd, the gene encoding TPP1 (telomere protection protein 1)-a shelterin component that recruits telomerase-accelerates hair regeneration in mice.</a:t>
             </a:r>
           </a:p>
           <a:p>
@@ -4204,12 +4204,12 @@
           </a:p>
           <a:p>
             <a:r>
-              <a:t>Do Generic EGFR-TKIs Perform as Well as Innovators? Real-World Evidence from Gefitinib-Treated EGFR-Mutated NSCLC in Indonesia</a:t>
-            </a:r>
-          </a:p>
-          <a:p>
-            <a:r>
-              <a:t>https://pubmed.ncbi.nlm.nih.gov/42663218/</a:t>
+              <a:t>Shelterin TPP1 Promotes Hair Regeneration Through Activating Bulge Hair Follicle Stem Cells</a:t>
+            </a:r>
+          </a:p>
+          <a:p>
+            <a:r>
+              <a:t>https://pubmed.ncbi.nlm.nih.gov/42663085/</a:t>
             </a:r>
           </a:p>
         </p:txBody>

--- a/data/2026-08-29/slides.pptx
+++ b/data/2026-08-29/slides.pptx
@@ -593,7 +593,7 @@
           </a:p>
           <a:p>
             <a:r>
-              <a:t>대본: 《Aging cell》 - Shelterin TPP1 Promotes Hair Regeneration Through Activating Bulge Hair Follicle Stem Cells</a:t>
+              <a:t>대본: 《Prostaglandins &amp; other lipid mediators》 - Role of Prostaglandins in Androgenetic Alopecia</a:t>
             </a:r>
           </a:p>
           <a:p>
@@ -673,7 +673,7 @@
           </a:p>
           <a:p>
             <a:r>
-              <a:t>대본: Telomere shortening drives hair follicle senescence, yet successful reversal of this aging process has remained elusive.</a:t>
+              <a:t>대본: Androgenetic alopecia (AGA) is the most prevalent progressive hair loss disorder worldwide, and its pathogenesis is closely linked to dysregulated androgen metabolism.</a:t>
             </a:r>
           </a:p>
           <a:p>
@@ -753,7 +753,7 @@
           </a:p>
           <a:p>
             <a:r>
-              <a:t>대본: Here, we report that stem cell overexpression of Acd, the gene encoding TPP1 (telomere protection protein 1)-a shelterin component that recruits telomerase-accelerates hair regeneration in mice.</a:t>
+              <a:t>대본: Conventional therapies for AGA have limited efficacy and adverse reactions.</a:t>
             </a:r>
           </a:p>
           <a:p>
@@ -4204,12 +4204,12 @@
           </a:p>
           <a:p>
             <a:r>
-              <a:t>Shelterin TPP1 Promotes Hair Regeneration Through Activating Bulge Hair Follicle Stem Cells</a:t>
-            </a:r>
-          </a:p>
-          <a:p>
-            <a:r>
-              <a:t>https://pubmed.ncbi.nlm.nih.gov/42663085/</a:t>
+              <a:t>Role of Prostaglandins in Androgenetic Alopecia</a:t>
+            </a:r>
+          </a:p>
+          <a:p>
+            <a:r>
+              <a:t>https://pubmed.ncbi.nlm.nih.gov/42660347/</a:t>
             </a:r>
           </a:p>
         </p:txBody>

--- a/data/2026-08-29/slides.pptx
+++ b/data/2026-08-29/slides.pptx
@@ -593,7 +593,7 @@
           </a:p>
           <a:p>
             <a:r>
-              <a:t>대본: 《Prostaglandins &amp; other lipid mediators》 - Role of Prostaglandins in Androgenetic Alopecia</a:t>
+              <a:t>대본: 《International journal of cosmetic science》 - New insights from data analysis of 12 global clinical studies on hair shedding</a:t>
             </a:r>
           </a:p>
           <a:p>
@@ -673,7 +673,7 @@
           </a:p>
           <a:p>
             <a:r>
-              <a:t>대본: Androgenetic alopecia (AGA) is the most prevalent progressive hair loss disorder worldwide, and its pathogenesis is closely linked to dysregulated androgen metabolism.</a:t>
+              <a:t>대본: This research analysed 12 clinical studies involving 805 participants (323 males and 482 females) across eight countries (China, Indonesia, UK, India, Brazil, Thailand, Turkey and US) with concerns about hair loss.</a:t>
             </a:r>
           </a:p>
           <a:p>
@@ -753,7 +753,7 @@
           </a:p>
           <a:p>
             <a:r>
-              <a:t>대본: Conventional therapies for AGA have limited efficacy and adverse reactions.</a:t>
+              <a:t>대본: Across the three recent Asian studies, whilst total hair fall comprised both shed hairs from the root (exogen hairs with a typical club end) and broken hairs, shed hairs from the root represented the predominant proportion, accounting for an average of 96.5% of total hair fall in Chinese female participants, 98.8% in Chinese male participants, and 72.2% in Indonesian female participants.</a:t>
             </a:r>
           </a:p>
           <a:p>
@@ -4204,12 +4204,12 @@
           </a:p>
           <a:p>
             <a:r>
-              <a:t>Role of Prostaglandins in Androgenetic Alopecia</a:t>
-            </a:r>
-          </a:p>
-          <a:p>
-            <a:r>
-              <a:t>https://pubmed.ncbi.nlm.nih.gov/42660347/</a:t>
+              <a:t>New insights from data analysis of 12 global clinical studies on hair shedding</a:t>
+            </a:r>
+          </a:p>
+          <a:p>
+            <a:r>
+              <a:t>https://pubmed.ncbi.nlm.nih.gov/42657759/</a:t>
             </a:r>
           </a:p>
         </p:txBody>

--- a/data/2026-08-29/slides.pptx
+++ b/data/2026-08-29/slides.pptx
@@ -593,7 +593,7 @@
           </a:p>
           <a:p>
             <a:r>
-              <a:t>대본: 《International journal of cosmetic science》 - New insights from data analysis of 12 global clinical studies on hair shedding</a:t>
+              <a:t>대본: 《Frontiers in immunology》 - Alopecia areata patients are associated with increased risk of glaucoma: a multicenter, retrospective cohort study</a:t>
             </a:r>
           </a:p>
           <a:p>
@@ -673,7 +673,7 @@
           </a:p>
           <a:p>
             <a:r>
-              <a:t>대본: This research analysed 12 clinical studies involving 805 participants (323 males and 482 females) across eight countries (China, Indonesia, UK, India, Brazil, Thailand, Turkey and US) with concerns about hair loss.</a:t>
+              <a:t>대본: Adults (≥18 years) with at least two visit records and a diagnosis of AA between 2005 and 2023 were included and matched 1:1 with individuals undergoing general health examinations without an AA diagnosis.</a:t>
             </a:r>
           </a:p>
           <a:p>
@@ -753,7 +753,7 @@
           </a:p>
           <a:p>
             <a:r>
-              <a:t>대본: Across the three recent Asian studies, whilst total hair fall comprised both shed hairs from the root (exogen hairs with a typical club end) and broken hairs, shed hairs from the root represented the predominant proportion, accounting for an average of 96.5% of total hair fall in Chinese female participants, 98.8% in Chinese male participants, and 72.2% in Indonesian female participants.</a:t>
+              <a:t>대본: During a 15-year follow-up, AA was associated with a higher risk of glaucoma (HR = 1.89; 95% CI, 1.51-2.38), consistent across models and sensitivity analyses.</a:t>
             </a:r>
           </a:p>
           <a:p>
@@ -3926,7 +3926,7 @@
       <p:grpSpPr/>
       <p:pic>
         <p:nvPicPr>
-          <p:cNvPr id="2" name="Picture 1" descr="frame_01_hook.png"/>
+          <p:cNvPr id="2" name="Picture 1" descr="frame_01_hook.jpg"/>
           <p:cNvPicPr>
             <a:picLocks noChangeAspect="1"/>
           </p:cNvPicPr>
@@ -3968,7 +3968,7 @@
       <p:grpSpPr/>
       <p:pic>
         <p:nvPicPr>
-          <p:cNvPr id="2" name="Picture 1" descr="frame_02_paper_intro.png"/>
+          <p:cNvPr id="2" name="Picture 1" descr="frame_02_paper_intro.jpg"/>
           <p:cNvPicPr>
             <a:picLocks noChangeAspect="1"/>
           </p:cNvPicPr>
@@ -4010,7 +4010,7 @@
       <p:grpSpPr/>
       <p:pic>
         <p:nvPicPr>
-          <p:cNvPr id="2" name="Picture 1" descr="frame_03_key_finding_1.png"/>
+          <p:cNvPr id="2" name="Picture 1" descr="frame_03_key_finding_1.jpg"/>
           <p:cNvPicPr>
             <a:picLocks noChangeAspect="1"/>
           </p:cNvPicPr>
@@ -4052,7 +4052,7 @@
       <p:grpSpPr/>
       <p:pic>
         <p:nvPicPr>
-          <p:cNvPr id="2" name="Picture 1" descr="frame_04_key_finding_2.png"/>
+          <p:cNvPr id="2" name="Picture 1" descr="frame_04_key_finding_2.jpg"/>
           <p:cNvPicPr>
             <a:picLocks noChangeAspect="1"/>
           </p:cNvPicPr>
@@ -4094,7 +4094,7 @@
       <p:grpSpPr/>
       <p:pic>
         <p:nvPicPr>
-          <p:cNvPr id="2" name="Picture 1" descr="frame_05_my_take.png"/>
+          <p:cNvPr id="2" name="Picture 1" descr="frame_05_my_take.jpg"/>
           <p:cNvPicPr>
             <a:picLocks noChangeAspect="1"/>
           </p:cNvPicPr>
@@ -4136,7 +4136,7 @@
       <p:grpSpPr/>
       <p:pic>
         <p:nvPicPr>
-          <p:cNvPr id="2" name="Picture 1" descr="frame_06_cta.png"/>
+          <p:cNvPr id="2" name="Picture 1" descr="frame_06_cta.jpg"/>
           <p:cNvPicPr>
             <a:picLocks noChangeAspect="1"/>
           </p:cNvPicPr>
@@ -4204,12 +4204,12 @@
           </a:p>
           <a:p>
             <a:r>
-              <a:t>New insights from data analysis of 12 global clinical studies on hair shedding</a:t>
-            </a:r>
-          </a:p>
-          <a:p>
-            <a:r>
-              <a:t>https://pubmed.ncbi.nlm.nih.gov/42657759/</a:t>
+              <a:t>Alopecia areata patients are associated with increased risk of glaucoma: a multicenter, retrospective cohort study</a:t>
+            </a:r>
+          </a:p>
+          <a:p>
+            <a:r>
+              <a:t>https://pubmed.ncbi.nlm.nih.gov/42656655/</a:t>
             </a:r>
           </a:p>
         </p:txBody>

--- a/data/2026-08-29/slides.pptx
+++ b/data/2026-08-29/slides.pptx
@@ -593,7 +593,7 @@
           </a:p>
           <a:p>
             <a:r>
-              <a:t>대본: 《Frontiers in immunology》 - Alopecia areata patients are associated with increased risk of glaucoma: a multicenter, retrospective cohort study</a:t>
+              <a:t>대본: 《Molecules (Basel, Switzerland)》 - Amphiphilic Covalent Organic Framework for Efficient DHT Adsorption and Androgenetic Alopecia Treatment via Spectral Technology</a:t>
             </a:r>
           </a:p>
           <a:p>
@@ -673,7 +673,7 @@
           </a:p>
           <a:p>
             <a:r>
-              <a:t>대본: Adults (≥18 years) with at least two visit records and a diagnosis of AA between 2005 and 2023 were included and matched 1:1 with individuals undergoing general health examinations without an AA diagnosis.</a:t>
+              <a:t>대본: Androgenetic alopecia (AGA) is a prevalent clinical disorder, and the key pathogenic factor is dihydrotestosterone (DHT) present in the pilosebaceous unit.</a:t>
             </a:r>
           </a:p>
           <a:p>
@@ -753,7 +753,7 @@
           </a:p>
           <a:p>
             <a:r>
-              <a:t>대본: During a 15-year follow-up, AA was associated with a higher risk of glaucoma (HR = 1.89; 95% CI, 1.51-2.38), consistent across models and sensitivity analyses.</a:t>
+              <a:t>대본: Current clinical therapeutic options are often associated with notable adverse effects, highlighting the urgent need for safer and more effective interventions.</a:t>
             </a:r>
           </a:p>
           <a:p>
@@ -4204,12 +4204,12 @@
           </a:p>
           <a:p>
             <a:r>
-              <a:t>Alopecia areata patients are associated with increased risk of glaucoma: a multicenter, retrospective cohort study</a:t>
-            </a:r>
-          </a:p>
-          <a:p>
-            <a:r>
-              <a:t>https://pubmed.ncbi.nlm.nih.gov/42656655/</a:t>
+              <a:t>Amphiphilic Covalent Organic Framework for Efficient DHT Adsorption and Androgenetic Alopecia Treatment via Spectral Technology</a:t>
+            </a:r>
+          </a:p>
+          <a:p>
+            <a:r>
+              <a:t>https://pubmed.ncbi.nlm.nih.gov/42654016/</a:t>
             </a:r>
           </a:p>
         </p:txBody>

--- a/data/2026-08-29/slides.pptx
+++ b/data/2026-08-29/slides.pptx
@@ -593,7 +593,7 @@
           </a:p>
           <a:p>
             <a:r>
-              <a:t>대본: 《Molecules (Basel, Switzerland)》 - Amphiphilic Covalent Organic Framework for Efficient DHT Adsorption and Androgenetic Alopecia Treatment via Spectral Technology</a:t>
+              <a:t>대본: 《Molecules (Basel, Switzerland)》 - Pungenin Promotes Hair Growth in Mouse Models of Androgenic Alopecia Through Transcriptional Regulation of the PI3K/AKT/mTOR Axis</a:t>
             </a:r>
           </a:p>
           <a:p>
@@ -673,7 +673,7 @@
           </a:p>
           <a:p>
             <a:r>
-              <a:t>대본: Androgenetic alopecia (AGA) is a prevalent clinical disorder, and the key pathogenic factor is dihydrotestosterone (DHT) present in the pilosebaceous unit.</a:t>
+              <a:t>대본: Androgenetic alopecia (AGA) is the most common form of hair loss, characterized by the progressive miniaturization of hair follicles driven by dihydrotestosterone (DHT)-mediated androgen receptor signaling.</a:t>
             </a:r>
           </a:p>
           <a:p>
@@ -753,7 +753,7 @@
           </a:p>
           <a:p>
             <a:r>
-              <a:t>대본: Current clinical therapeutic options are often associated with notable adverse effects, highlighting the urgent need for safer and more effective interventions.</a:t>
+              <a:t>대본: Current pharmacotherapies remain limited in efficacy and are often associated with undesirable side effects.</a:t>
             </a:r>
           </a:p>
           <a:p>
@@ -4204,12 +4204,12 @@
           </a:p>
           <a:p>
             <a:r>
-              <a:t>Amphiphilic Covalent Organic Framework for Efficient DHT Adsorption and Androgenetic Alopecia Treatment via Spectral Technology</a:t>
-            </a:r>
-          </a:p>
-          <a:p>
-            <a:r>
-              <a:t>https://pubmed.ncbi.nlm.nih.gov/42654016/</a:t>
+              <a:t>Pungenin Promotes Hair Growth in Mouse Models of Androgenic Alopecia Through Transcriptional Regulation of the PI3K/AKT/mTOR Axis</a:t>
+            </a:r>
+          </a:p>
+          <a:p>
+            <a:r>
+              <a:t>https://pubmed.ncbi.nlm.nih.gov/42653946/</a:t>
             </a:r>
           </a:p>
         </p:txBody>

--- a/data/2026-08-29/slides.pptx
+++ b/data/2026-08-29/slides.pptx
@@ -593,7 +593,7 @@
           </a:p>
           <a:p>
             <a:r>
-              <a:t>대본: 《Molecules (Basel, Switzerland)》 - Pungenin Promotes Hair Growth in Mouse Models of Androgenic Alopecia Through Transcriptional Regulation of the PI3K/AKT/mTOR Axis</a:t>
+              <a:t>대본: 《Dermatologic surgery : official publication for American Society for Dermatologic Surgery [et al.]》 - Can Transplanted Hair Follicles Survive in the Absence of Arrector Pili Muscle Attachments?</a:t>
             </a:r>
           </a:p>
           <a:p>
@@ -673,7 +673,7 @@
           </a:p>
           <a:p>
             <a:r>
-              <a:t>대본: Androgenetic alopecia (AGA) is the most common form of hair loss, characterized by the progressive miniaturization of hair follicles driven by dihydrotestosterone (DHT)-mediated androgen receptor signaling.</a:t>
+              <a:t>대본: Methods: Scalp biopsies from recipient and native donor areas of 5 patients with suboptimal graft survival after HT were analyzed.</a:t>
             </a:r>
           </a:p>
           <a:p>
@@ -753,7 +753,7 @@
           </a:p>
           <a:p>
             <a:r>
-              <a:t>대본: Current pharmacotherapies remain limited in efficacy and are often associated with undesirable side effects.</a:t>
+              <a:t>대본: Two 4-mm punch biopsies were obtained in each case for horizontal and vertical sectioning.</a:t>
             </a:r>
           </a:p>
           <a:p>
@@ -4204,12 +4204,12 @@
           </a:p>
           <a:p>
             <a:r>
-              <a:t>Pungenin Promotes Hair Growth in Mouse Models of Androgenic Alopecia Through Transcriptional Regulation of the PI3K/AKT/mTOR Axis</a:t>
-            </a:r>
-          </a:p>
-          <a:p>
-            <a:r>
-              <a:t>https://pubmed.ncbi.nlm.nih.gov/42653946/</a:t>
+              <a:t>Can Transplanted Hair Follicles Survive in the Absence of Arrector Pili Muscle Attachments?</a:t>
+            </a:r>
+          </a:p>
+          <a:p>
+            <a:r>
+              <a:t>https://pubmed.ncbi.nlm.nih.gov/42664316/</a:t>
             </a:r>
           </a:p>
         </p:txBody>
